--- a/slides/00-Review.pptx
+++ b/slides/00-Review.pptx
@@ -228,7 +228,7 @@
           <a:p>
             <a:fld id="{C5B45307-6ED4-B142-BD64-10F739779302}" type="datetimeFigureOut">
               <a:rPr lang="en-US" smtClean="0"/>
-              <a:t>8/19/25</a:t>
+              <a:t>8/26/25</a:t>
             </a:fld>
             <a:endParaRPr lang="en-US"/>
           </a:p>
@@ -4576,7 +4576,7 @@
           <a:noFill/>
           <a:extLst>
             <a:ext uri="{909E8E84-426E-40dd-AFC4-6F175D3DCCD1}">
-              <a14:hiddenFill xmlns:a14="http://schemas.microsoft.com/office/drawing/2010/main" xmlns="">
+              <a14:hiddenFill xmlns="" xmlns:a14="http://schemas.microsoft.com/office/drawing/2010/main">
                 <a:solidFill>
                   <a:srgbClr val="FFFFFF"/>
                 </a:solidFill>
@@ -4635,7 +4635,7 @@
             </a:ln>
             <a:extLst>
               <a:ext uri="{91240B29-F687-4f45-9708-019B960494DF}">
-                <a14:hiddenLine xmlns:a14="http://schemas.microsoft.com/office/drawing/2010/main" xmlns="" w="9525">
+                <a14:hiddenLine xmlns="" xmlns:a14="http://schemas.microsoft.com/office/drawing/2010/main" w="9525">
                   <a:solidFill>
                     <a:srgbClr val="000000"/>
                   </a:solidFill>
@@ -4725,7 +4725,7 @@
             </a:ln>
             <a:extLst>
               <a:ext uri="{91240B29-F687-4f45-9708-019B960494DF}">
-                <a14:hiddenLine xmlns:a14="http://schemas.microsoft.com/office/drawing/2010/main" xmlns="" w="9525">
+                <a14:hiddenLine xmlns="" xmlns:a14="http://schemas.microsoft.com/office/drawing/2010/main" w="9525">
                   <a:solidFill>
                     <a:srgbClr val="000000"/>
                   </a:solidFill>
@@ -4815,7 +4815,7 @@
             </a:ln>
             <a:extLst>
               <a:ext uri="{91240B29-F687-4f45-9708-019B960494DF}">
-                <a14:hiddenLine xmlns:a14="http://schemas.microsoft.com/office/drawing/2010/main" xmlns="" w="9525">
+                <a14:hiddenLine xmlns="" xmlns:a14="http://schemas.microsoft.com/office/drawing/2010/main" w="9525">
                   <a:solidFill>
                     <a:srgbClr val="000000"/>
                   </a:solidFill>
@@ -4849,7 +4849,7 @@
             </a:ln>
             <a:extLst>
               <a:ext uri="{91240B29-F687-4f45-9708-019B960494DF}">
-                <a14:hiddenLine xmlns:a14="http://schemas.microsoft.com/office/drawing/2010/main" xmlns="" w="9525">
+                <a14:hiddenLine xmlns="" xmlns:a14="http://schemas.microsoft.com/office/drawing/2010/main" w="9525">
                   <a:solidFill>
                     <a:srgbClr val="000000"/>
                   </a:solidFill>
@@ -4939,7 +4939,7 @@
             </a:ln>
             <a:extLst>
               <a:ext uri="{91240B29-F687-4f45-9708-019B960494DF}">
-                <a14:hiddenLine xmlns:a14="http://schemas.microsoft.com/office/drawing/2010/main" xmlns="" w="9525">
+                <a14:hiddenLine xmlns="" xmlns:a14="http://schemas.microsoft.com/office/drawing/2010/main" w="9525">
                   <a:solidFill>
                     <a:srgbClr val="000000"/>
                   </a:solidFill>
@@ -5001,7 +5001,7 @@
             </a:ln>
             <a:extLst>
               <a:ext uri="{91240B29-F687-4f45-9708-019B960494DF}">
-                <a14:hiddenLine xmlns:a14="http://schemas.microsoft.com/office/drawing/2010/main" xmlns="" w="9525">
+                <a14:hiddenLine xmlns="" xmlns:a14="http://schemas.microsoft.com/office/drawing/2010/main" w="9525">
                   <a:solidFill>
                     <a:srgbClr val="000000"/>
                   </a:solidFill>
@@ -5063,7 +5063,7 @@
             </a:ln>
             <a:extLst>
               <a:ext uri="{91240B29-F687-4f45-9708-019B960494DF}">
-                <a14:hiddenLine xmlns:a14="http://schemas.microsoft.com/office/drawing/2010/main" xmlns="" w="9525">
+                <a14:hiddenLine xmlns="" xmlns:a14="http://schemas.microsoft.com/office/drawing/2010/main" w="9525">
                   <a:solidFill>
                     <a:srgbClr val="000000"/>
                   </a:solidFill>
@@ -5153,7 +5153,7 @@
             </a:ln>
             <a:extLst>
               <a:ext uri="{91240B29-F687-4f45-9708-019B960494DF}">
-                <a14:hiddenLine xmlns:a14="http://schemas.microsoft.com/office/drawing/2010/main" xmlns="" w="9525">
+                <a14:hiddenLine xmlns="" xmlns:a14="http://schemas.microsoft.com/office/drawing/2010/main" w="9525">
                   <a:solidFill>
                     <a:srgbClr val="000000"/>
                   </a:solidFill>
@@ -5215,7 +5215,7 @@
             </a:ln>
             <a:extLst>
               <a:ext uri="{91240B29-F687-4f45-9708-019B960494DF}">
-                <a14:hiddenLine xmlns:a14="http://schemas.microsoft.com/office/drawing/2010/main" xmlns="" w="9525">
+                <a14:hiddenLine xmlns="" xmlns:a14="http://schemas.microsoft.com/office/drawing/2010/main" w="9525">
                   <a:solidFill>
                     <a:srgbClr val="000000"/>
                   </a:solidFill>
@@ -5277,7 +5277,7 @@
             </a:ln>
             <a:extLst>
               <a:ext uri="{91240B29-F687-4f45-9708-019B960494DF}">
-                <a14:hiddenLine xmlns:a14="http://schemas.microsoft.com/office/drawing/2010/main" xmlns="" w="9525">
+                <a14:hiddenLine xmlns="" xmlns:a14="http://schemas.microsoft.com/office/drawing/2010/main" w="9525">
                   <a:solidFill>
                     <a:srgbClr val="000000"/>
                   </a:solidFill>
@@ -5367,7 +5367,7 @@
             </a:ln>
             <a:extLst>
               <a:ext uri="{91240B29-F687-4f45-9708-019B960494DF}">
-                <a14:hiddenLine xmlns:a14="http://schemas.microsoft.com/office/drawing/2010/main" xmlns="" w="9525">
+                <a14:hiddenLine xmlns="" xmlns:a14="http://schemas.microsoft.com/office/drawing/2010/main" w="9525">
                   <a:solidFill>
                     <a:srgbClr val="000000"/>
                   </a:solidFill>
@@ -5457,7 +5457,7 @@
             </a:ln>
             <a:extLst>
               <a:ext uri="{91240B29-F687-4f45-9708-019B960494DF}">
-                <a14:hiddenLine xmlns:a14="http://schemas.microsoft.com/office/drawing/2010/main" xmlns="" w="9525">
+                <a14:hiddenLine xmlns="" xmlns:a14="http://schemas.microsoft.com/office/drawing/2010/main" w="9525">
                   <a:solidFill>
                     <a:srgbClr val="000000"/>
                   </a:solidFill>
@@ -5519,7 +5519,7 @@
             </a:ln>
             <a:extLst>
               <a:ext uri="{91240B29-F687-4f45-9708-019B960494DF}">
-                <a14:hiddenLine xmlns:a14="http://schemas.microsoft.com/office/drawing/2010/main" xmlns="" w="9525">
+                <a14:hiddenLine xmlns="" xmlns:a14="http://schemas.microsoft.com/office/drawing/2010/main" w="9525">
                   <a:solidFill>
                     <a:srgbClr val="000000"/>
                   </a:solidFill>
@@ -5629,7 +5629,7 @@
             </a:ln>
             <a:extLst>
               <a:ext uri="{91240B29-F687-4f45-9708-019B960494DF}">
-                <a14:hiddenLine xmlns:a14="http://schemas.microsoft.com/office/drawing/2010/main" xmlns="" w="9525">
+                <a14:hiddenLine xmlns="" xmlns:a14="http://schemas.microsoft.com/office/drawing/2010/main" w="9525">
                   <a:solidFill>
                     <a:srgbClr val="000000"/>
                   </a:solidFill>
@@ -5691,7 +5691,7 @@
             </a:ln>
             <a:extLst>
               <a:ext uri="{91240B29-F687-4f45-9708-019B960494DF}">
-                <a14:hiddenLine xmlns:a14="http://schemas.microsoft.com/office/drawing/2010/main" xmlns="" w="9525">
+                <a14:hiddenLine xmlns="" xmlns:a14="http://schemas.microsoft.com/office/drawing/2010/main" w="9525">
                   <a:solidFill>
                     <a:srgbClr val="000000"/>
                   </a:solidFill>
@@ -5781,7 +5781,7 @@
             </a:ln>
             <a:extLst>
               <a:ext uri="{91240B29-F687-4f45-9708-019B960494DF}">
-                <a14:hiddenLine xmlns:a14="http://schemas.microsoft.com/office/drawing/2010/main" xmlns="" w="9525">
+                <a14:hiddenLine xmlns="" xmlns:a14="http://schemas.microsoft.com/office/drawing/2010/main" w="9525">
                   <a:solidFill>
                     <a:srgbClr val="000000"/>
                   </a:solidFill>
@@ -5871,7 +5871,7 @@
             </a:ln>
             <a:extLst>
               <a:ext uri="{91240B29-F687-4f45-9708-019B960494DF}">
-                <a14:hiddenLine xmlns:a14="http://schemas.microsoft.com/office/drawing/2010/main" xmlns="" w="9525">
+                <a14:hiddenLine xmlns="" xmlns:a14="http://schemas.microsoft.com/office/drawing/2010/main" w="9525">
                   <a:solidFill>
                     <a:srgbClr val="000000"/>
                   </a:solidFill>
@@ -5933,7 +5933,7 @@
             </a:ln>
             <a:extLst>
               <a:ext uri="{91240B29-F687-4f45-9708-019B960494DF}">
-                <a14:hiddenLine xmlns:a14="http://schemas.microsoft.com/office/drawing/2010/main" xmlns="" w="9525">
+                <a14:hiddenLine xmlns="" xmlns:a14="http://schemas.microsoft.com/office/drawing/2010/main" w="9525">
                   <a:solidFill>
                     <a:srgbClr val="000000"/>
                   </a:solidFill>
@@ -6023,7 +6023,7 @@
             </a:ln>
             <a:extLst>
               <a:ext uri="{91240B29-F687-4f45-9708-019B960494DF}">
-                <a14:hiddenLine xmlns:a14="http://schemas.microsoft.com/office/drawing/2010/main" xmlns="" w="9525">
+                <a14:hiddenLine xmlns="" xmlns:a14="http://schemas.microsoft.com/office/drawing/2010/main" w="9525">
                   <a:solidFill>
                     <a:srgbClr val="000000"/>
                   </a:solidFill>
@@ -6113,7 +6113,7 @@
             </a:ln>
             <a:extLst>
               <a:ext uri="{91240B29-F687-4f45-9708-019B960494DF}">
-                <a14:hiddenLine xmlns:a14="http://schemas.microsoft.com/office/drawing/2010/main" xmlns="" w="9525">
+                <a14:hiddenLine xmlns="" xmlns:a14="http://schemas.microsoft.com/office/drawing/2010/main" w="9525">
                   <a:solidFill>
                     <a:srgbClr val="000000"/>
                   </a:solidFill>
@@ -6169,7 +6169,7 @@
             </a:ln>
             <a:extLst>
               <a:ext uri="{91240B29-F687-4f45-9708-019B960494DF}">
-                <a14:hiddenLine xmlns:a14="http://schemas.microsoft.com/office/drawing/2010/main" xmlns="" w="9525">
+                <a14:hiddenLine xmlns="" xmlns:a14="http://schemas.microsoft.com/office/drawing/2010/main" w="9525">
                   <a:solidFill>
                     <a:srgbClr val="000000"/>
                   </a:solidFill>
@@ -6259,7 +6259,7 @@
             </a:ln>
             <a:extLst>
               <a:ext uri="{91240B29-F687-4f45-9708-019B960494DF}">
-                <a14:hiddenLine xmlns:a14="http://schemas.microsoft.com/office/drawing/2010/main" xmlns="" w="9525">
+                <a14:hiddenLine xmlns="" xmlns:a14="http://schemas.microsoft.com/office/drawing/2010/main" w="9525">
                   <a:solidFill>
                     <a:srgbClr val="000000"/>
                   </a:solidFill>
@@ -6315,7 +6315,7 @@
             </a:ln>
             <a:extLst>
               <a:ext uri="{91240B29-F687-4f45-9708-019B960494DF}">
-                <a14:hiddenLine xmlns:a14="http://schemas.microsoft.com/office/drawing/2010/main" xmlns="" w="9525">
+                <a14:hiddenLine xmlns="" xmlns:a14="http://schemas.microsoft.com/office/drawing/2010/main" w="9525">
                   <a:solidFill>
                     <a:srgbClr val="000000"/>
                   </a:solidFill>
@@ -6405,7 +6405,7 @@
             </a:ln>
             <a:extLst>
               <a:ext uri="{91240B29-F687-4f45-9708-019B960494DF}">
-                <a14:hiddenLine xmlns:a14="http://schemas.microsoft.com/office/drawing/2010/main" xmlns="" w="9525">
+                <a14:hiddenLine xmlns="" xmlns:a14="http://schemas.microsoft.com/office/drawing/2010/main" w="9525">
                   <a:solidFill>
                     <a:srgbClr val="000000"/>
                   </a:solidFill>
@@ -6473,7 +6473,7 @@
             </a:ln>
             <a:extLst>
               <a:ext uri="{91240B29-F687-4f45-9708-019B960494DF}">
-                <a14:hiddenLine xmlns:a14="http://schemas.microsoft.com/office/drawing/2010/main" xmlns="" w="9525">
+                <a14:hiddenLine xmlns="" xmlns:a14="http://schemas.microsoft.com/office/drawing/2010/main" w="9525">
                   <a:solidFill>
                     <a:srgbClr val="000000"/>
                   </a:solidFill>
@@ -6563,7 +6563,7 @@
             </a:ln>
             <a:extLst>
               <a:ext uri="{91240B29-F687-4f45-9708-019B960494DF}">
-                <a14:hiddenLine xmlns:a14="http://schemas.microsoft.com/office/drawing/2010/main" xmlns="" w="9525">
+                <a14:hiddenLine xmlns="" xmlns:a14="http://schemas.microsoft.com/office/drawing/2010/main" w="9525">
                   <a:solidFill>
                     <a:srgbClr val="000000"/>
                   </a:solidFill>
@@ -6631,7 +6631,7 @@
             </a:ln>
             <a:extLst>
               <a:ext uri="{91240B29-F687-4f45-9708-019B960494DF}">
-                <a14:hiddenLine xmlns:a14="http://schemas.microsoft.com/office/drawing/2010/main" xmlns="" w="9525">
+                <a14:hiddenLine xmlns="" xmlns:a14="http://schemas.microsoft.com/office/drawing/2010/main" w="9525">
                   <a:solidFill>
                     <a:srgbClr val="000000"/>
                   </a:solidFill>
@@ -6721,7 +6721,7 @@
             </a:ln>
             <a:extLst>
               <a:ext uri="{91240B29-F687-4f45-9708-019B960494DF}">
-                <a14:hiddenLine xmlns:a14="http://schemas.microsoft.com/office/drawing/2010/main" xmlns="" w="9525">
+                <a14:hiddenLine xmlns="" xmlns:a14="http://schemas.microsoft.com/office/drawing/2010/main" w="9525">
                   <a:solidFill>
                     <a:srgbClr val="000000"/>
                   </a:solidFill>
@@ -6755,7 +6755,7 @@
             </a:ln>
             <a:extLst>
               <a:ext uri="{91240B29-F687-4f45-9708-019B960494DF}">
-                <a14:hiddenLine xmlns:a14="http://schemas.microsoft.com/office/drawing/2010/main" xmlns="" w="9525">
+                <a14:hiddenLine xmlns="" xmlns:a14="http://schemas.microsoft.com/office/drawing/2010/main" w="9525">
                   <a:solidFill>
                     <a:srgbClr val="000000"/>
                   </a:solidFill>
@@ -6845,7 +6845,7 @@
             </a:ln>
             <a:extLst>
               <a:ext uri="{91240B29-F687-4f45-9708-019B960494DF}">
-                <a14:hiddenLine xmlns:a14="http://schemas.microsoft.com/office/drawing/2010/main" xmlns="" w="9525">
+                <a14:hiddenLine xmlns="" xmlns:a14="http://schemas.microsoft.com/office/drawing/2010/main" w="9525">
                   <a:solidFill>
                     <a:srgbClr val="000000"/>
                   </a:solidFill>
@@ -6907,7 +6907,7 @@
             </a:ln>
             <a:extLst>
               <a:ext uri="{91240B29-F687-4f45-9708-019B960494DF}">
-                <a14:hiddenLine xmlns:a14="http://schemas.microsoft.com/office/drawing/2010/main" xmlns="" w="9525">
+                <a14:hiddenLine xmlns="" xmlns:a14="http://schemas.microsoft.com/office/drawing/2010/main" w="9525">
                   <a:solidFill>
                     <a:srgbClr val="000000"/>
                   </a:solidFill>
@@ -6969,7 +6969,7 @@
             </a:ln>
             <a:extLst>
               <a:ext uri="{91240B29-F687-4f45-9708-019B960494DF}">
-                <a14:hiddenLine xmlns:a14="http://schemas.microsoft.com/office/drawing/2010/main" xmlns="" w="9525">
+                <a14:hiddenLine xmlns="" xmlns:a14="http://schemas.microsoft.com/office/drawing/2010/main" w="9525">
                   <a:solidFill>
                     <a:srgbClr val="000000"/>
                   </a:solidFill>
@@ -7059,7 +7059,7 @@
             </a:ln>
             <a:extLst>
               <a:ext uri="{91240B29-F687-4f45-9708-019B960494DF}">
-                <a14:hiddenLine xmlns:a14="http://schemas.microsoft.com/office/drawing/2010/main" xmlns="" w="9525">
+                <a14:hiddenLine xmlns="" xmlns:a14="http://schemas.microsoft.com/office/drawing/2010/main" w="9525">
                   <a:solidFill>
                     <a:srgbClr val="000000"/>
                   </a:solidFill>
@@ -7127,7 +7127,7 @@
             </a:ln>
             <a:extLst>
               <a:ext uri="{91240B29-F687-4f45-9708-019B960494DF}">
-                <a14:hiddenLine xmlns:a14="http://schemas.microsoft.com/office/drawing/2010/main" xmlns="" w="9525">
+                <a14:hiddenLine xmlns="" xmlns:a14="http://schemas.microsoft.com/office/drawing/2010/main" w="9525">
                   <a:solidFill>
                     <a:srgbClr val="000000"/>
                   </a:solidFill>
@@ -7189,7 +7189,7 @@
             </a:ln>
             <a:extLst>
               <a:ext uri="{91240B29-F687-4f45-9708-019B960494DF}">
-                <a14:hiddenLine xmlns:a14="http://schemas.microsoft.com/office/drawing/2010/main" xmlns="" w="9525">
+                <a14:hiddenLine xmlns="" xmlns:a14="http://schemas.microsoft.com/office/drawing/2010/main" w="9525">
                   <a:solidFill>
                     <a:srgbClr val="000000"/>
                   </a:solidFill>
@@ -7279,7 +7279,7 @@
             </a:ln>
             <a:extLst>
               <a:ext uri="{91240B29-F687-4f45-9708-019B960494DF}">
-                <a14:hiddenLine xmlns:a14="http://schemas.microsoft.com/office/drawing/2010/main" xmlns="" w="9525">
+                <a14:hiddenLine xmlns="" xmlns:a14="http://schemas.microsoft.com/office/drawing/2010/main" w="9525">
                   <a:solidFill>
                     <a:srgbClr val="000000"/>
                   </a:solidFill>
@@ -7341,7 +7341,7 @@
             </a:ln>
             <a:extLst>
               <a:ext uri="{91240B29-F687-4f45-9708-019B960494DF}">
-                <a14:hiddenLine xmlns:a14="http://schemas.microsoft.com/office/drawing/2010/main" xmlns="" w="9525">
+                <a14:hiddenLine xmlns="" xmlns:a14="http://schemas.microsoft.com/office/drawing/2010/main" w="9525">
                   <a:solidFill>
                     <a:srgbClr val="000000"/>
                   </a:solidFill>
@@ -7431,7 +7431,7 @@
             </a:ln>
             <a:extLst>
               <a:ext uri="{91240B29-F687-4f45-9708-019B960494DF}">
-                <a14:hiddenLine xmlns:a14="http://schemas.microsoft.com/office/drawing/2010/main" xmlns="" w="9525">
+                <a14:hiddenLine xmlns="" xmlns:a14="http://schemas.microsoft.com/office/drawing/2010/main" w="9525">
                   <a:solidFill>
                     <a:srgbClr val="000000"/>
                   </a:solidFill>
@@ -7493,7 +7493,7 @@
             </a:ln>
             <a:extLst>
               <a:ext uri="{91240B29-F687-4f45-9708-019B960494DF}">
-                <a14:hiddenLine xmlns:a14="http://schemas.microsoft.com/office/drawing/2010/main" xmlns="" w="9525">
+                <a14:hiddenLine xmlns="" xmlns:a14="http://schemas.microsoft.com/office/drawing/2010/main" w="9525">
                   <a:solidFill>
                     <a:srgbClr val="000000"/>
                   </a:solidFill>
@@ -7583,7 +7583,7 @@
             </a:ln>
             <a:extLst>
               <a:ext uri="{91240B29-F687-4f45-9708-019B960494DF}">
-                <a14:hiddenLine xmlns:a14="http://schemas.microsoft.com/office/drawing/2010/main" xmlns="" w="9525">
+                <a14:hiddenLine xmlns="" xmlns:a14="http://schemas.microsoft.com/office/drawing/2010/main" w="9525">
                   <a:solidFill>
                     <a:srgbClr val="000000"/>
                   </a:solidFill>
@@ -7617,7 +7617,7 @@
             </a:ln>
             <a:extLst>
               <a:ext uri="{91240B29-F687-4f45-9708-019B960494DF}">
-                <a14:hiddenLine xmlns:a14="http://schemas.microsoft.com/office/drawing/2010/main" xmlns="" w="9525">
+                <a14:hiddenLine xmlns="" xmlns:a14="http://schemas.microsoft.com/office/drawing/2010/main" w="9525">
                   <a:solidFill>
                     <a:srgbClr val="000000"/>
                   </a:solidFill>
@@ -7682,7 +7682,7 @@
             </a:ln>
             <a:extLst>
               <a:ext uri="{91240B29-F687-4f45-9708-019B960494DF}">
-                <a14:hiddenLine xmlns:a14="http://schemas.microsoft.com/office/drawing/2010/main" xmlns="" w="9525">
+                <a14:hiddenLine xmlns="" xmlns:a14="http://schemas.microsoft.com/office/drawing/2010/main" w="9525">
                   <a:solidFill>
                     <a:srgbClr val="000000"/>
                   </a:solidFill>
@@ -7772,7 +7772,7 @@
             </a:ln>
             <a:extLst>
               <a:ext uri="{91240B29-F687-4f45-9708-019B960494DF}">
-                <a14:hiddenLine xmlns:a14="http://schemas.microsoft.com/office/drawing/2010/main" xmlns="" w="9525">
+                <a14:hiddenLine xmlns="" xmlns:a14="http://schemas.microsoft.com/office/drawing/2010/main" w="9525">
                   <a:solidFill>
                     <a:srgbClr val="000000"/>
                   </a:solidFill>
@@ -7834,7 +7834,7 @@
             </a:ln>
             <a:extLst>
               <a:ext uri="{91240B29-F687-4f45-9708-019B960494DF}">
-                <a14:hiddenLine xmlns:a14="http://schemas.microsoft.com/office/drawing/2010/main" xmlns="" w="9525">
+                <a14:hiddenLine xmlns="" xmlns:a14="http://schemas.microsoft.com/office/drawing/2010/main" w="9525">
                   <a:solidFill>
                     <a:srgbClr val="000000"/>
                   </a:solidFill>
@@ -7924,7 +7924,7 @@
             </a:ln>
             <a:extLst>
               <a:ext uri="{91240B29-F687-4f45-9708-019B960494DF}">
-                <a14:hiddenLine xmlns:a14="http://schemas.microsoft.com/office/drawing/2010/main" xmlns="" w="9525">
+                <a14:hiddenLine xmlns="" xmlns:a14="http://schemas.microsoft.com/office/drawing/2010/main" w="9525">
                   <a:solidFill>
                     <a:srgbClr val="000000"/>
                   </a:solidFill>
@@ -8014,7 +8014,7 @@
             </a:ln>
             <a:extLst>
               <a:ext uri="{91240B29-F687-4f45-9708-019B960494DF}">
-                <a14:hiddenLine xmlns:a14="http://schemas.microsoft.com/office/drawing/2010/main" xmlns="" w="9525">
+                <a14:hiddenLine xmlns="" xmlns:a14="http://schemas.microsoft.com/office/drawing/2010/main" w="9525">
                   <a:solidFill>
                     <a:srgbClr val="000000"/>
                   </a:solidFill>
@@ -8079,7 +8079,7 @@
             </a:ln>
             <a:extLst>
               <a:ext uri="{91240B29-F687-4f45-9708-019B960494DF}">
-                <a14:hiddenLine xmlns:a14="http://schemas.microsoft.com/office/drawing/2010/main" xmlns="" w="9525">
+                <a14:hiddenLine xmlns="" xmlns:a14="http://schemas.microsoft.com/office/drawing/2010/main" w="9525">
                   <a:solidFill>
                     <a:srgbClr val="000000"/>
                   </a:solidFill>
@@ -8141,7 +8141,7 @@
             </a:ln>
             <a:extLst>
               <a:ext uri="{91240B29-F687-4f45-9708-019B960494DF}">
-                <a14:hiddenLine xmlns:a14="http://schemas.microsoft.com/office/drawing/2010/main" xmlns="" w="9525">
+                <a14:hiddenLine xmlns="" xmlns:a14="http://schemas.microsoft.com/office/drawing/2010/main" w="9525">
                   <a:solidFill>
                     <a:srgbClr val="000000"/>
                   </a:solidFill>
@@ -8231,7 +8231,7 @@
             </a:ln>
             <a:extLst>
               <a:ext uri="{91240B29-F687-4f45-9708-019B960494DF}">
-                <a14:hiddenLine xmlns:a14="http://schemas.microsoft.com/office/drawing/2010/main" xmlns="" w="9525">
+                <a14:hiddenLine xmlns="" xmlns:a14="http://schemas.microsoft.com/office/drawing/2010/main" w="9525">
                   <a:solidFill>
                     <a:srgbClr val="000000"/>
                   </a:solidFill>
@@ -8321,7 +8321,7 @@
             </a:ln>
             <a:extLst>
               <a:ext uri="{91240B29-F687-4f45-9708-019B960494DF}">
-                <a14:hiddenLine xmlns:a14="http://schemas.microsoft.com/office/drawing/2010/main" xmlns="" w="9525">
+                <a14:hiddenLine xmlns="" xmlns:a14="http://schemas.microsoft.com/office/drawing/2010/main" w="9525">
                   <a:solidFill>
                     <a:srgbClr val="000000"/>
                   </a:solidFill>
@@ -8383,7 +8383,7 @@
             </a:ln>
             <a:extLst>
               <a:ext uri="{91240B29-F687-4f45-9708-019B960494DF}">
-                <a14:hiddenLine xmlns:a14="http://schemas.microsoft.com/office/drawing/2010/main" xmlns="" w="9525">
+                <a14:hiddenLine xmlns="" xmlns:a14="http://schemas.microsoft.com/office/drawing/2010/main" w="9525">
                   <a:solidFill>
                     <a:srgbClr val="000000"/>
                   </a:solidFill>
@@ -8503,7 +8503,7 @@
             </a:ln>
             <a:extLst>
               <a:ext uri="{91240B29-F687-4f45-9708-019B960494DF}">
-                <a14:hiddenLine xmlns:a14="http://schemas.microsoft.com/office/drawing/2010/main" xmlns="" w="9525">
+                <a14:hiddenLine xmlns="" xmlns:a14="http://schemas.microsoft.com/office/drawing/2010/main" w="9525">
                   <a:solidFill>
                     <a:srgbClr val="000000"/>
                   </a:solidFill>
@@ -8571,7 +8571,7 @@
             </a:ln>
             <a:extLst>
               <a:ext uri="{91240B29-F687-4f45-9708-019B960494DF}">
-                <a14:hiddenLine xmlns:a14="http://schemas.microsoft.com/office/drawing/2010/main" xmlns="" w="9525">
+                <a14:hiddenLine xmlns="" xmlns:a14="http://schemas.microsoft.com/office/drawing/2010/main" w="9525">
                   <a:solidFill>
                     <a:srgbClr val="000000"/>
                   </a:solidFill>
@@ -8661,7 +8661,7 @@
             </a:ln>
             <a:extLst>
               <a:ext uri="{91240B29-F687-4f45-9708-019B960494DF}">
-                <a14:hiddenLine xmlns:a14="http://schemas.microsoft.com/office/drawing/2010/main" xmlns="" w="9525">
+                <a14:hiddenLine xmlns="" xmlns:a14="http://schemas.microsoft.com/office/drawing/2010/main" w="9525">
                   <a:solidFill>
                     <a:srgbClr val="000000"/>
                   </a:solidFill>
@@ -8801,7 +8801,7 @@
           <a:p>
             <a:fld id="{26642A91-53FC-A248-B2D7-4BDF09D835F8}" type="datetime1">
               <a:rPr lang="en-US" smtClean="0"/>
-              <a:t>8/19/25</a:t>
+              <a:t>8/26/25</a:t>
             </a:fld>
             <a:endParaRPr lang="en-US"/>
           </a:p>
@@ -9068,7 +9068,7 @@
           <a:p>
             <a:fld id="{156A271B-B4D9-AE45-BB64-271F70A45E29}" type="datetime1">
               <a:rPr lang="en-US" smtClean="0"/>
-              <a:t>8/19/25</a:t>
+              <a:t>8/26/25</a:t>
             </a:fld>
             <a:endParaRPr lang="en-US"/>
           </a:p>
@@ -9264,7 +9264,7 @@
           <a:p>
             <a:fld id="{85D86012-4C7E-B641-B60E-212967A06467}" type="datetime1">
               <a:rPr lang="en-US" smtClean="0"/>
-              <a:t>8/19/25</a:t>
+              <a:t>8/26/25</a:t>
             </a:fld>
             <a:endParaRPr lang="en-US"/>
           </a:p>
@@ -9527,7 +9527,7 @@
           <a:p>
             <a:fld id="{7DE69B85-F094-654D-B167-186F86221E8A}" type="datetime1">
               <a:rPr lang="en-US" smtClean="0"/>
-              <a:t>8/19/25</a:t>
+              <a:t>8/26/25</a:t>
             </a:fld>
             <a:endParaRPr lang="en-US"/>
           </a:p>
@@ -9961,7 +9961,7 @@
           <a:p>
             <a:fld id="{A7652B0B-FF8F-C941-9B61-DE6D3E8F4840}" type="datetime1">
               <a:rPr lang="en-US" smtClean="0"/>
-              <a:t>8/19/25</a:t>
+              <a:t>8/26/25</a:t>
             </a:fld>
             <a:endParaRPr lang="en-US"/>
           </a:p>
@@ -10507,7 +10507,7 @@
           <a:p>
             <a:fld id="{C6E43348-E7B9-894D-943F-9C2E88DBCAA9}" type="datetime1">
               <a:rPr lang="en-US" smtClean="0"/>
-              <a:t>8/19/25</a:t>
+              <a:t>8/26/25</a:t>
             </a:fld>
             <a:endParaRPr lang="en-US"/>
           </a:p>
@@ -11227,7 +11227,7 @@
           <a:p>
             <a:fld id="{4AC801DC-1FED-544D-84F2-B84B35C9121A}" type="datetime1">
               <a:rPr lang="en-US" smtClean="0"/>
-              <a:t>8/19/25</a:t>
+              <a:t>8/26/25</a:t>
             </a:fld>
             <a:endParaRPr lang="en-US"/>
           </a:p>
@@ -11397,7 +11397,7 @@
           <a:p>
             <a:fld id="{5FF9A012-E155-4D45-A2C6-D256744D52BE}" type="datetime1">
               <a:rPr lang="en-US" smtClean="0"/>
-              <a:t>8/19/25</a:t>
+              <a:t>8/26/25</a:t>
             </a:fld>
             <a:endParaRPr lang="en-US"/>
           </a:p>
@@ -11577,7 +11577,7 @@
           <a:p>
             <a:fld id="{BD793959-70FE-D548-A2F6-C563579349DC}" type="datetime1">
               <a:rPr lang="en-US" smtClean="0"/>
-              <a:t>8/19/25</a:t>
+              <a:t>8/26/25</a:t>
             </a:fld>
             <a:endParaRPr lang="en-US"/>
           </a:p>
@@ -12119,7 +12119,7 @@
           <a:p>
             <a:fld id="{80855E06-9A94-624D-BFDE-0B76EC389D5F}" type="datetime1">
               <a:rPr lang="en-US" smtClean="0"/>
-              <a:t>8/19/25</a:t>
+              <a:t>8/26/25</a:t>
             </a:fld>
             <a:endParaRPr/>
           </a:p>
@@ -12490,7 +12490,7 @@
           <a:p>
             <a:fld id="{BD09D0B8-C0AD-9842-89E3-FC30CAC82249}" type="datetime1">
               <a:rPr lang="en-US" smtClean="0"/>
-              <a:t>8/19/25</a:t>
+              <a:t>8/26/25</a:t>
             </a:fld>
             <a:endParaRPr lang="en-US"/>
           </a:p>
@@ -12740,7 +12740,7 @@
           <a:p>
             <a:fld id="{D7F4F455-19C7-FE40-A6B8-AD2879ED05AD}" type="datetime1">
               <a:rPr lang="en-US" smtClean="0"/>
-              <a:t>8/19/25</a:t>
+              <a:t>8/26/25</a:t>
             </a:fld>
             <a:endParaRPr lang="en-US"/>
           </a:p>
@@ -12972,7 +12972,7 @@
           <a:p>
             <a:fld id="{F6C61B30-C700-024D-9267-361A6B7DC22C}" type="datetime1">
               <a:rPr lang="en-US" smtClean="0"/>
-              <a:t>8/19/25</a:t>
+              <a:t>8/26/25</a:t>
             </a:fld>
             <a:endParaRPr lang="en-US"/>
           </a:p>
@@ -13358,7 +13358,7 @@
           <a:p>
             <a:fld id="{B0F31207-3A96-3E44-8D0D-FA1D8F609C2F}" type="datetime1">
               <a:rPr lang="en-US" smtClean="0"/>
-              <a:t>8/19/25</a:t>
+              <a:t>8/26/25</a:t>
             </a:fld>
             <a:endParaRPr lang="en-US"/>
           </a:p>
@@ -13481,7 +13481,7 @@
           <a:p>
             <a:fld id="{DDE97E33-B691-904D-8B28-069085BA6222}" type="datetime1">
               <a:rPr lang="en-US" smtClean="0"/>
-              <a:t>8/19/25</a:t>
+              <a:t>8/26/25</a:t>
             </a:fld>
             <a:endParaRPr lang="en-US"/>
           </a:p>
@@ -13576,7 +13576,7 @@
           <a:p>
             <a:fld id="{A86EDF5B-FC17-6F49-B789-6BCF71F83D72}" type="datetime1">
               <a:rPr lang="en-US" smtClean="0"/>
-              <a:t>8/19/25</a:t>
+              <a:t>8/26/25</a:t>
             </a:fld>
             <a:endParaRPr lang="en-US"/>
           </a:p>
@@ -13825,7 +13825,7 @@
           <a:p>
             <a:fld id="{725203A1-54F0-8E46-B3A2-F7E622B1934C}" type="datetime1">
               <a:rPr lang="en-US" smtClean="0"/>
-              <a:t>8/19/25</a:t>
+              <a:t>8/26/25</a:t>
             </a:fld>
             <a:endParaRPr lang="en-US"/>
           </a:p>
@@ -14110,7 +14110,7 @@
           <a:p>
             <a:fld id="{71F594D6-91F2-4441-8E6C-4E0A3A8283A7}" type="datetime1">
               <a:rPr lang="en-US" smtClean="0"/>
-              <a:t>8/19/25</a:t>
+              <a:t>8/26/25</a:t>
             </a:fld>
             <a:endParaRPr lang="en-US"/>
           </a:p>
@@ -14233,7 +14233,7 @@
           <a:noFill/>
           <a:extLst>
             <a:ext uri="{909E8E84-426E-40dd-AFC4-6F175D3DCCD1}">
-              <a14:hiddenFill xmlns:a14="http://schemas.microsoft.com/office/drawing/2010/main" xmlns="">
+              <a14:hiddenFill xmlns="" xmlns:a14="http://schemas.microsoft.com/office/drawing/2010/main">
                 <a:solidFill>
                   <a:srgbClr val="FFFFFF"/>
                 </a:solidFill>
@@ -14307,7 +14307,7 @@
               </a:ln>
               <a:extLst>
                 <a:ext uri="{91240B29-F687-4f45-9708-019B960494DF}">
-                  <a14:hiddenLine xmlns:a14="http://schemas.microsoft.com/office/drawing/2010/main" xmlns="" w="9525">
+                  <a14:hiddenLine xmlns="" xmlns:a14="http://schemas.microsoft.com/office/drawing/2010/main" w="9525">
                     <a:solidFill>
                       <a:srgbClr val="000000"/>
                     </a:solidFill>
@@ -14397,7 +14397,7 @@
               </a:ln>
               <a:extLst>
                 <a:ext uri="{91240B29-F687-4f45-9708-019B960494DF}">
-                  <a14:hiddenLine xmlns:a14="http://schemas.microsoft.com/office/drawing/2010/main" xmlns="" w="9525">
+                  <a14:hiddenLine xmlns="" xmlns:a14="http://schemas.microsoft.com/office/drawing/2010/main" w="9525">
                     <a:solidFill>
                       <a:srgbClr val="000000"/>
                     </a:solidFill>
@@ -14487,7 +14487,7 @@
               </a:ln>
               <a:extLst>
                 <a:ext uri="{91240B29-F687-4f45-9708-019B960494DF}">
-                  <a14:hiddenLine xmlns:a14="http://schemas.microsoft.com/office/drawing/2010/main" xmlns="" w="9525">
+                  <a14:hiddenLine xmlns="" xmlns:a14="http://schemas.microsoft.com/office/drawing/2010/main" w="9525">
                     <a:solidFill>
                       <a:srgbClr val="000000"/>
                     </a:solidFill>
@@ -14549,7 +14549,7 @@
               </a:ln>
               <a:extLst>
                 <a:ext uri="{91240B29-F687-4f45-9708-019B960494DF}">
-                  <a14:hiddenLine xmlns:a14="http://schemas.microsoft.com/office/drawing/2010/main" xmlns="" w="9525">
+                  <a14:hiddenLine xmlns="" xmlns:a14="http://schemas.microsoft.com/office/drawing/2010/main" w="9525">
                     <a:solidFill>
                       <a:srgbClr val="000000"/>
                     </a:solidFill>
@@ -14639,7 +14639,7 @@
               </a:ln>
               <a:extLst>
                 <a:ext uri="{91240B29-F687-4f45-9708-019B960494DF}">
-                  <a14:hiddenLine xmlns:a14="http://schemas.microsoft.com/office/drawing/2010/main" xmlns="" w="9525">
+                  <a14:hiddenLine xmlns="" xmlns:a14="http://schemas.microsoft.com/office/drawing/2010/main" w="9525">
                     <a:solidFill>
                       <a:srgbClr val="000000"/>
                     </a:solidFill>
@@ -14701,7 +14701,7 @@
               </a:ln>
               <a:extLst>
                 <a:ext uri="{91240B29-F687-4f45-9708-019B960494DF}">
-                  <a14:hiddenLine xmlns:a14="http://schemas.microsoft.com/office/drawing/2010/main" xmlns="" w="9525">
+                  <a14:hiddenLine xmlns="" xmlns:a14="http://schemas.microsoft.com/office/drawing/2010/main" w="9525">
                     <a:solidFill>
                       <a:srgbClr val="000000"/>
                     </a:solidFill>
@@ -14763,7 +14763,7 @@
               </a:ln>
               <a:extLst>
                 <a:ext uri="{91240B29-F687-4f45-9708-019B960494DF}">
-                  <a14:hiddenLine xmlns:a14="http://schemas.microsoft.com/office/drawing/2010/main" xmlns="" w="9525">
+                  <a14:hiddenLine xmlns="" xmlns:a14="http://schemas.microsoft.com/office/drawing/2010/main" w="9525">
                     <a:solidFill>
                       <a:srgbClr val="000000"/>
                     </a:solidFill>
@@ -14853,7 +14853,7 @@
               </a:ln>
               <a:extLst>
                 <a:ext uri="{91240B29-F687-4f45-9708-019B960494DF}">
-                  <a14:hiddenLine xmlns:a14="http://schemas.microsoft.com/office/drawing/2010/main" xmlns="" w="9525">
+                  <a14:hiddenLine xmlns="" xmlns:a14="http://schemas.microsoft.com/office/drawing/2010/main" w="9525">
                     <a:solidFill>
                       <a:srgbClr val="000000"/>
                     </a:solidFill>
@@ -14943,7 +14943,7 @@
               </a:ln>
               <a:extLst>
                 <a:ext uri="{91240B29-F687-4f45-9708-019B960494DF}">
-                  <a14:hiddenLine xmlns:a14="http://schemas.microsoft.com/office/drawing/2010/main" xmlns="" w="9525">
+                  <a14:hiddenLine xmlns="" xmlns:a14="http://schemas.microsoft.com/office/drawing/2010/main" w="9525">
                     <a:solidFill>
                       <a:srgbClr val="000000"/>
                     </a:solidFill>
@@ -15005,7 +15005,7 @@
               </a:ln>
               <a:extLst>
                 <a:ext uri="{91240B29-F687-4f45-9708-019B960494DF}">
-                  <a14:hiddenLine xmlns:a14="http://schemas.microsoft.com/office/drawing/2010/main" xmlns="" w="9525">
+                  <a14:hiddenLine xmlns="" xmlns:a14="http://schemas.microsoft.com/office/drawing/2010/main" w="9525">
                     <a:solidFill>
                       <a:srgbClr val="000000"/>
                     </a:solidFill>
@@ -15115,7 +15115,7 @@
               </a:ln>
               <a:extLst>
                 <a:ext uri="{91240B29-F687-4f45-9708-019B960494DF}">
-                  <a14:hiddenLine xmlns:a14="http://schemas.microsoft.com/office/drawing/2010/main" xmlns="" w="9525">
+                  <a14:hiddenLine xmlns="" xmlns:a14="http://schemas.microsoft.com/office/drawing/2010/main" w="9525">
                     <a:solidFill>
                       <a:srgbClr val="000000"/>
                     </a:solidFill>
@@ -15199,7 +15199,7 @@
               </a:ln>
               <a:extLst>
                 <a:ext uri="{91240B29-F687-4f45-9708-019B960494DF}">
-                  <a14:hiddenLine xmlns:a14="http://schemas.microsoft.com/office/drawing/2010/main" xmlns="" w="9525">
+                  <a14:hiddenLine xmlns="" xmlns:a14="http://schemas.microsoft.com/office/drawing/2010/main" w="9525">
                     <a:solidFill>
                       <a:srgbClr val="000000"/>
                     </a:solidFill>
@@ -15261,7 +15261,7 @@
               </a:ln>
               <a:extLst>
                 <a:ext uri="{91240B29-F687-4f45-9708-019B960494DF}">
-                  <a14:hiddenLine xmlns:a14="http://schemas.microsoft.com/office/drawing/2010/main" xmlns="" w="9525">
+                  <a14:hiddenLine xmlns="" xmlns:a14="http://schemas.microsoft.com/office/drawing/2010/main" w="9525">
                     <a:solidFill>
                       <a:srgbClr val="000000"/>
                     </a:solidFill>
@@ -15323,7 +15323,7 @@
               </a:ln>
               <a:extLst>
                 <a:ext uri="{91240B29-F687-4f45-9708-019B960494DF}">
-                  <a14:hiddenLine xmlns:a14="http://schemas.microsoft.com/office/drawing/2010/main" xmlns="" w="9525">
+                  <a14:hiddenLine xmlns="" xmlns:a14="http://schemas.microsoft.com/office/drawing/2010/main" w="9525">
                     <a:solidFill>
                       <a:srgbClr val="000000"/>
                     </a:solidFill>
@@ -15413,7 +15413,7 @@
               </a:ln>
               <a:extLst>
                 <a:ext uri="{91240B29-F687-4f45-9708-019B960494DF}">
-                  <a14:hiddenLine xmlns:a14="http://schemas.microsoft.com/office/drawing/2010/main" xmlns="" w="9525">
+                  <a14:hiddenLine xmlns="" xmlns:a14="http://schemas.microsoft.com/office/drawing/2010/main" w="9525">
                     <a:solidFill>
                       <a:srgbClr val="000000"/>
                     </a:solidFill>
@@ -15447,7 +15447,7 @@
               </a:ln>
               <a:extLst>
                 <a:ext uri="{91240B29-F687-4f45-9708-019B960494DF}">
-                  <a14:hiddenLine xmlns:a14="http://schemas.microsoft.com/office/drawing/2010/main" xmlns="" w="9525">
+                  <a14:hiddenLine xmlns="" xmlns:a14="http://schemas.microsoft.com/office/drawing/2010/main" w="9525">
                     <a:solidFill>
                       <a:srgbClr val="000000"/>
                     </a:solidFill>
@@ -15512,7 +15512,7 @@
               </a:ln>
               <a:extLst>
                 <a:ext uri="{91240B29-F687-4f45-9708-019B960494DF}">
-                  <a14:hiddenLine xmlns:a14="http://schemas.microsoft.com/office/drawing/2010/main" xmlns="" w="9525">
+                  <a14:hiddenLine xmlns="" xmlns:a14="http://schemas.microsoft.com/office/drawing/2010/main" w="9525">
                     <a:solidFill>
                       <a:srgbClr val="000000"/>
                     </a:solidFill>
@@ -15602,7 +15602,7 @@
               </a:ln>
               <a:extLst>
                 <a:ext uri="{91240B29-F687-4f45-9708-019B960494DF}">
-                  <a14:hiddenLine xmlns:a14="http://schemas.microsoft.com/office/drawing/2010/main" xmlns="" w="9525">
+                  <a14:hiddenLine xmlns="" xmlns:a14="http://schemas.microsoft.com/office/drawing/2010/main" w="9525">
                     <a:solidFill>
                       <a:srgbClr val="000000"/>
                     </a:solidFill>
@@ -15664,7 +15664,7 @@
               </a:ln>
               <a:extLst>
                 <a:ext uri="{91240B29-F687-4f45-9708-019B960494DF}">
-                  <a14:hiddenLine xmlns:a14="http://schemas.microsoft.com/office/drawing/2010/main" xmlns="" w="9525">
+                  <a14:hiddenLine xmlns="" xmlns:a14="http://schemas.microsoft.com/office/drawing/2010/main" w="9525">
                     <a:solidFill>
                       <a:srgbClr val="000000"/>
                     </a:solidFill>
@@ -15754,7 +15754,7 @@
               </a:ln>
               <a:extLst>
                 <a:ext uri="{91240B29-F687-4f45-9708-019B960494DF}">
-                  <a14:hiddenLine xmlns:a14="http://schemas.microsoft.com/office/drawing/2010/main" xmlns="" w="9525">
+                  <a14:hiddenLine xmlns="" xmlns:a14="http://schemas.microsoft.com/office/drawing/2010/main" w="9525">
                     <a:solidFill>
                       <a:srgbClr val="000000"/>
                     </a:solidFill>
@@ -15819,7 +15819,7 @@
               </a:ln>
               <a:extLst>
                 <a:ext uri="{91240B29-F687-4f45-9708-019B960494DF}">
-                  <a14:hiddenLine xmlns:a14="http://schemas.microsoft.com/office/drawing/2010/main" xmlns="" w="9525">
+                  <a14:hiddenLine xmlns="" xmlns:a14="http://schemas.microsoft.com/office/drawing/2010/main" w="9525">
                     <a:solidFill>
                       <a:srgbClr val="000000"/>
                     </a:solidFill>
@@ -15881,7 +15881,7 @@
               </a:ln>
               <a:extLst>
                 <a:ext uri="{91240B29-F687-4f45-9708-019B960494DF}">
-                  <a14:hiddenLine xmlns:a14="http://schemas.microsoft.com/office/drawing/2010/main" xmlns="" w="9525">
+                  <a14:hiddenLine xmlns="" xmlns:a14="http://schemas.microsoft.com/office/drawing/2010/main" w="9525">
                     <a:solidFill>
                       <a:srgbClr val="000000"/>
                     </a:solidFill>
@@ -15971,7 +15971,7 @@
               </a:ln>
               <a:extLst>
                 <a:ext uri="{91240B29-F687-4f45-9708-019B960494DF}">
-                  <a14:hiddenLine xmlns:a14="http://schemas.microsoft.com/office/drawing/2010/main" xmlns="" w="9525">
+                  <a14:hiddenLine xmlns="" xmlns:a14="http://schemas.microsoft.com/office/drawing/2010/main" w="9525">
                     <a:solidFill>
                       <a:srgbClr val="000000"/>
                     </a:solidFill>
@@ -16061,7 +16061,7 @@
               </a:ln>
               <a:extLst>
                 <a:ext uri="{91240B29-F687-4f45-9708-019B960494DF}">
-                  <a14:hiddenLine xmlns:a14="http://schemas.microsoft.com/office/drawing/2010/main" xmlns="" w="9525">
+                  <a14:hiddenLine xmlns="" xmlns:a14="http://schemas.microsoft.com/office/drawing/2010/main" w="9525">
                     <a:solidFill>
                       <a:srgbClr val="000000"/>
                     </a:solidFill>
@@ -16126,7 +16126,7 @@
               </a:ln>
               <a:extLst>
                 <a:ext uri="{91240B29-F687-4f45-9708-019B960494DF}">
-                  <a14:hiddenLine xmlns:a14="http://schemas.microsoft.com/office/drawing/2010/main" xmlns="" w="9525">
+                  <a14:hiddenLine xmlns="" xmlns:a14="http://schemas.microsoft.com/office/drawing/2010/main" w="9525">
                     <a:solidFill>
                       <a:srgbClr val="000000"/>
                     </a:solidFill>
@@ -16246,7 +16246,7 @@
               </a:ln>
               <a:extLst>
                 <a:ext uri="{91240B29-F687-4f45-9708-019B960494DF}">
-                  <a14:hiddenLine xmlns:a14="http://schemas.microsoft.com/office/drawing/2010/main" xmlns="" w="9525">
+                  <a14:hiddenLine xmlns="" xmlns:a14="http://schemas.microsoft.com/office/drawing/2010/main" w="9525">
                     <a:solidFill>
                       <a:srgbClr val="000000"/>
                     </a:solidFill>
@@ -16327,7 +16327,7 @@
               </a:ln>
               <a:extLst>
                 <a:ext uri="{91240B29-F687-4f45-9708-019B960494DF}">
-                  <a14:hiddenLine xmlns:a14="http://schemas.microsoft.com/office/drawing/2010/main" xmlns="" w="9525">
+                  <a14:hiddenLine xmlns="" xmlns:a14="http://schemas.microsoft.com/office/drawing/2010/main" w="9525">
                     <a:solidFill>
                       <a:srgbClr val="000000"/>
                     </a:solidFill>
@@ -16442,7 +16442,7 @@
               </a:ln>
               <a:extLst>
                 <a:ext uri="{91240B29-F687-4f45-9708-019B960494DF}">
-                  <a14:hiddenLine xmlns:a14="http://schemas.microsoft.com/office/drawing/2010/main" xmlns="" w="9525">
+                  <a14:hiddenLine xmlns="" xmlns:a14="http://schemas.microsoft.com/office/drawing/2010/main" w="9525">
                     <a:solidFill>
                       <a:srgbClr val="000000"/>
                     </a:solidFill>
@@ -16532,7 +16532,7 @@
               </a:ln>
               <a:extLst>
                 <a:ext uri="{91240B29-F687-4f45-9708-019B960494DF}">
-                  <a14:hiddenLine xmlns:a14="http://schemas.microsoft.com/office/drawing/2010/main" xmlns="" w="9525">
+                  <a14:hiddenLine xmlns="" xmlns:a14="http://schemas.microsoft.com/office/drawing/2010/main" w="9525">
                     <a:solidFill>
                       <a:srgbClr val="000000"/>
                     </a:solidFill>
@@ -16597,7 +16597,7 @@
               </a:ln>
               <a:extLst>
                 <a:ext uri="{91240B29-F687-4f45-9708-019B960494DF}">
-                  <a14:hiddenLine xmlns:a14="http://schemas.microsoft.com/office/drawing/2010/main" xmlns="" w="9525">
+                  <a14:hiddenLine xmlns="" xmlns:a14="http://schemas.microsoft.com/office/drawing/2010/main" w="9525">
                     <a:solidFill>
                       <a:srgbClr val="000000"/>
                     </a:solidFill>
@@ -16687,7 +16687,7 @@
               </a:ln>
               <a:extLst>
                 <a:ext uri="{91240B29-F687-4f45-9708-019B960494DF}">
-                  <a14:hiddenLine xmlns:a14="http://schemas.microsoft.com/office/drawing/2010/main" xmlns="" w="9525">
+                  <a14:hiddenLine xmlns="" xmlns:a14="http://schemas.microsoft.com/office/drawing/2010/main" w="9525">
                     <a:solidFill>
                       <a:srgbClr val="000000"/>
                     </a:solidFill>
@@ -16755,7 +16755,7 @@
               </a:ln>
               <a:extLst>
                 <a:ext uri="{91240B29-F687-4f45-9708-019B960494DF}">
-                  <a14:hiddenLine xmlns:a14="http://schemas.microsoft.com/office/drawing/2010/main" xmlns="" w="9525">
+                  <a14:hiddenLine xmlns="" xmlns:a14="http://schemas.microsoft.com/office/drawing/2010/main" w="9525">
                     <a:solidFill>
                       <a:srgbClr val="000000"/>
                     </a:solidFill>
@@ -16845,7 +16845,7 @@
               </a:ln>
               <a:extLst>
                 <a:ext uri="{91240B29-F687-4f45-9708-019B960494DF}">
-                  <a14:hiddenLine xmlns:a14="http://schemas.microsoft.com/office/drawing/2010/main" xmlns="" w="9525">
+                  <a14:hiddenLine xmlns="" xmlns:a14="http://schemas.microsoft.com/office/drawing/2010/main" w="9525">
                     <a:solidFill>
                       <a:srgbClr val="000000"/>
                     </a:solidFill>
@@ -16913,7 +16913,7 @@
               </a:ln>
               <a:extLst>
                 <a:ext uri="{91240B29-F687-4f45-9708-019B960494DF}">
-                  <a14:hiddenLine xmlns:a14="http://schemas.microsoft.com/office/drawing/2010/main" xmlns="" w="9525">
+                  <a14:hiddenLine xmlns="" xmlns:a14="http://schemas.microsoft.com/office/drawing/2010/main" w="9525">
                     <a:solidFill>
                       <a:srgbClr val="000000"/>
                     </a:solidFill>
@@ -17003,7 +17003,7 @@
               </a:ln>
               <a:extLst>
                 <a:ext uri="{91240B29-F687-4f45-9708-019B960494DF}">
-                  <a14:hiddenLine xmlns:a14="http://schemas.microsoft.com/office/drawing/2010/main" xmlns="" w="9525">
+                  <a14:hiddenLine xmlns="" xmlns:a14="http://schemas.microsoft.com/office/drawing/2010/main" w="9525">
                     <a:solidFill>
                       <a:srgbClr val="000000"/>
                     </a:solidFill>
@@ -17037,7 +17037,7 @@
               </a:ln>
               <a:extLst>
                 <a:ext uri="{91240B29-F687-4f45-9708-019B960494DF}">
-                  <a14:hiddenLine xmlns:a14="http://schemas.microsoft.com/office/drawing/2010/main" xmlns="" w="9525">
+                  <a14:hiddenLine xmlns="" xmlns:a14="http://schemas.microsoft.com/office/drawing/2010/main" w="9525">
                     <a:solidFill>
                       <a:srgbClr val="000000"/>
                     </a:solidFill>
@@ -17177,7 +17177,7 @@
           <a:p>
             <a:fld id="{D683C672-EABB-2F4E-850E-917D0E501BB0}" type="datetime1">
               <a:rPr lang="en-US" smtClean="0"/>
-              <a:t>8/19/25</a:t>
+              <a:t>8/26/25</a:t>
             </a:fld>
             <a:endParaRPr lang="en-US"/>
           </a:p>
@@ -18035,7 +18035,9 @@
                 <a:spcPts val="0"/>
               </a:spcAft>
               <a:buClr>
-                <a:schemeClr val="dk1"/>
+                <a:schemeClr val="tx1">
+                  <a:lumMod val="95000"/>
+                </a:schemeClr>
               </a:buClr>
               <a:buSzPct val="100000"/>
               <a:buFont typeface="Arial"/>
@@ -18087,7 +18089,9 @@
                 <a:spcPts val="0"/>
               </a:spcAft>
               <a:buClr>
-                <a:schemeClr val="dk1"/>
+                <a:schemeClr val="tx1">
+                  <a:lumMod val="95000"/>
+                </a:schemeClr>
               </a:buClr>
               <a:buSzPct val="100000"/>
               <a:buFont typeface="Arial"/>
@@ -18147,7 +18151,9 @@
                 <a:spcPts val="0"/>
               </a:spcAft>
               <a:buClr>
-                <a:schemeClr val="dk1"/>
+                <a:schemeClr val="tx1">
+                  <a:lumMod val="95000"/>
+                </a:schemeClr>
               </a:buClr>
               <a:buSzPct val="100000"/>
               <a:buFont typeface="Arial"/>
@@ -18179,7 +18185,9 @@
                 <a:spcPts val="0"/>
               </a:spcAft>
               <a:buClr>
-                <a:schemeClr val="dk1"/>
+                <a:schemeClr val="tx1">
+                  <a:lumMod val="95000"/>
+                </a:schemeClr>
               </a:buClr>
               <a:buSzPct val="100000"/>
               <a:buNone/>
@@ -18218,7 +18226,9 @@
                 <a:spcPts val="0"/>
               </a:spcAft>
               <a:buClr>
-                <a:schemeClr val="dk1"/>
+                <a:schemeClr val="tx1">
+                  <a:lumMod val="95000"/>
+                </a:schemeClr>
               </a:buClr>
               <a:buSzPct val="100000"/>
               <a:buFont typeface="Arial"/>
@@ -18242,7 +18252,9 @@
                 <a:spcPts val="0"/>
               </a:spcAft>
               <a:buClr>
-                <a:schemeClr val="dk1"/>
+                <a:schemeClr val="tx1">
+                  <a:lumMod val="95000"/>
+                </a:schemeClr>
               </a:buClr>
               <a:buSzPct val="100000"/>
               <a:buFont typeface="Arial"/>
@@ -18266,7 +18278,9 @@
                 <a:spcPts val="0"/>
               </a:spcAft>
               <a:buClr>
-                <a:schemeClr val="dk1"/>
+                <a:schemeClr val="tx1">
+                  <a:lumMod val="95000"/>
+                </a:schemeClr>
               </a:buClr>
               <a:buSzPct val="100000"/>
               <a:buFont typeface="Arial"/>
@@ -18449,7 +18463,9 @@
                 <a:spcPts val="0"/>
               </a:spcAft>
               <a:buClr>
-                <a:schemeClr val="dk1"/>
+                <a:schemeClr val="tx1">
+                  <a:lumMod val="95000"/>
+                </a:schemeClr>
               </a:buClr>
               <a:buSzPct val="100000"/>
               <a:buChar char="•"/>
@@ -18503,7 +18519,9 @@
                 <a:spcPts val="0"/>
               </a:spcAft>
               <a:buClr>
-                <a:schemeClr val="dk1"/>
+                <a:schemeClr val="tx1">
+                  <a:lumMod val="95000"/>
+                </a:schemeClr>
               </a:buClr>
               <a:buSzPct val="100000"/>
               <a:buNone/>
@@ -18522,7 +18540,9 @@
                 <a:spcPts val="0"/>
               </a:spcAft>
               <a:buClr>
-                <a:schemeClr val="dk1"/>
+                <a:schemeClr val="tx1">
+                  <a:lumMod val="95000"/>
+                </a:schemeClr>
               </a:buClr>
               <a:buSzPct val="100000"/>
               <a:buChar char="•"/>
@@ -18580,7 +18600,9 @@
                 <a:spcPts val="0"/>
               </a:spcAft>
               <a:buClr>
-                <a:schemeClr val="dk1"/>
+                <a:schemeClr val="tx1">
+                  <a:lumMod val="95000"/>
+                </a:schemeClr>
               </a:buClr>
               <a:buSzPct val="100000"/>
               <a:buNone/>
@@ -18599,7 +18621,9 @@
                 <a:spcPts val="0"/>
               </a:spcAft>
               <a:buClr>
-                <a:schemeClr val="dk1"/>
+                <a:schemeClr val="tx1">
+                  <a:lumMod val="95000"/>
+                </a:schemeClr>
               </a:buClr>
               <a:buSzPct val="100000"/>
               <a:buChar char="•"/>
@@ -18657,7 +18681,9 @@
                 <a:spcPts val="0"/>
               </a:spcAft>
               <a:buClr>
-                <a:schemeClr val="dk1"/>
+                <a:schemeClr val="tx1">
+                  <a:lumMod val="95000"/>
+                </a:schemeClr>
               </a:buClr>
               <a:buSzPct val="100000"/>
               <a:buNone/>
@@ -18803,8 +18829,8 @@
           </a:p>
         </p:txBody>
       </p:sp>
-      <mc:AlternateContent xmlns:mc="http://schemas.openxmlformats.org/markup-compatibility/2006">
-        <mc:Choice xmlns:a14="http://schemas.microsoft.com/office/drawing/2010/main" Requires="a14">
+      <mc:AlternateContent xmlns:mc="http://schemas.openxmlformats.org/markup-compatibility/2006" xmlns:a14="http://schemas.microsoft.com/office/drawing/2010/main">
+        <mc:Choice Requires="a14">
           <p:sp>
             <p:nvSpPr>
               <p:cNvPr id="2" name="Google Shape;168;p11">
@@ -19019,7 +19045,7 @@
             </p:txBody>
           </p:sp>
         </mc:Choice>
-        <mc:Fallback>
+        <mc:Fallback xmlns="">
           <p:sp>
             <p:nvSpPr>
               <p:cNvPr id="2" name="Google Shape;168;p11">
@@ -19067,8 +19093,8 @@
           </p:sp>
         </mc:Fallback>
       </mc:AlternateContent>
-      <mc:AlternateContent xmlns:mc="http://schemas.openxmlformats.org/markup-compatibility/2006">
-        <mc:Choice xmlns:a14="http://schemas.microsoft.com/office/drawing/2010/main" Requires="a14">
+      <mc:AlternateContent xmlns:mc="http://schemas.openxmlformats.org/markup-compatibility/2006" xmlns:a14="http://schemas.microsoft.com/office/drawing/2010/main">
+        <mc:Choice Requires="a14">
           <p:sp>
             <p:nvSpPr>
               <p:cNvPr id="3" name="Google Shape;168;p11">
@@ -19286,7 +19312,7 @@
             </p:txBody>
           </p:sp>
         </mc:Choice>
-        <mc:Fallback>
+        <mc:Fallback xmlns="">
           <p:sp>
             <p:nvSpPr>
               <p:cNvPr id="3" name="Google Shape;168;p11">
@@ -19334,8 +19360,8 @@
           </p:sp>
         </mc:Fallback>
       </mc:AlternateContent>
-      <mc:AlternateContent xmlns:mc="http://schemas.openxmlformats.org/markup-compatibility/2006">
-        <mc:Choice xmlns:a14="http://schemas.microsoft.com/office/drawing/2010/main" Requires="a14">
+      <mc:AlternateContent xmlns:mc="http://schemas.openxmlformats.org/markup-compatibility/2006" xmlns:a14="http://schemas.microsoft.com/office/drawing/2010/main">
+        <mc:Choice Requires="a14">
           <p:sp>
             <p:nvSpPr>
               <p:cNvPr id="4" name="Google Shape;168;p11">
@@ -19553,7 +19579,7 @@
             </p:txBody>
           </p:sp>
         </mc:Choice>
-        <mc:Fallback>
+        <mc:Fallback xmlns="">
           <p:sp>
             <p:nvSpPr>
               <p:cNvPr id="4" name="Google Shape;168;p11">
@@ -19730,8 +19756,8 @@
           </a:p>
         </p:txBody>
       </p:sp>
-      <mc:AlternateContent xmlns:mc="http://schemas.openxmlformats.org/markup-compatibility/2006">
-        <mc:Choice xmlns:a14="http://schemas.microsoft.com/office/drawing/2010/main" Requires="a14">
+      <mc:AlternateContent xmlns:mc="http://schemas.openxmlformats.org/markup-compatibility/2006" xmlns:a14="http://schemas.microsoft.com/office/drawing/2010/main">
+        <mc:Choice Requires="a14">
           <p:sp>
             <p:nvSpPr>
               <p:cNvPr id="2" name="Google Shape;159;p10">
@@ -20771,7 +20797,7 @@
             </p:txBody>
           </p:sp>
         </mc:Choice>
-        <mc:Fallback>
+        <mc:Fallback xmlns="">
           <p:sp>
             <p:nvSpPr>
               <p:cNvPr id="2" name="Google Shape;159;p10">
@@ -20898,8 +20924,8 @@
           </a:p>
         </p:txBody>
       </p:sp>
-      <mc:AlternateContent xmlns:mc="http://schemas.openxmlformats.org/markup-compatibility/2006">
-        <mc:Choice xmlns:a14="http://schemas.microsoft.com/office/drawing/2010/main" Requires="a14">
+      <mc:AlternateContent xmlns:mc="http://schemas.openxmlformats.org/markup-compatibility/2006" xmlns:a14="http://schemas.microsoft.com/office/drawing/2010/main">
+        <mc:Choice Requires="a14">
           <p:sp>
             <p:nvSpPr>
               <p:cNvPr id="2" name="Google Shape;159;p10">
@@ -21233,7 +21259,7 @@
             </p:txBody>
           </p:sp>
         </mc:Choice>
-        <mc:Fallback>
+        <mc:Fallback xmlns="">
           <p:sp>
             <p:nvSpPr>
               <p:cNvPr id="2" name="Google Shape;159;p10">
@@ -21414,8 +21440,8 @@
           </a:p>
         </p:txBody>
       </p:sp>
-      <mc:AlternateContent xmlns:mc="http://schemas.openxmlformats.org/markup-compatibility/2006">
-        <mc:Choice xmlns:a14="http://schemas.microsoft.com/office/drawing/2010/main" Requires="a14">
+      <mc:AlternateContent xmlns:mc="http://schemas.openxmlformats.org/markup-compatibility/2006" xmlns:a14="http://schemas.microsoft.com/office/drawing/2010/main">
+        <mc:Choice Requires="a14">
           <p:sp>
             <p:nvSpPr>
               <p:cNvPr id="3" name="Google Shape;159;p10">
@@ -21955,7 +21981,7 @@
                     <m:sSub>
                       <m:sSubPr>
                         <m:ctrlPr>
-                          <a:rPr lang="en-US" sz="2800" b="0" i="0" smtClean="0">
+                          <a:rPr lang="en-US" sz="2800" b="0" i="1" smtClean="0">
                             <a:latin typeface="Cambria Math" panose="02040503050406030204" pitchFamily="18" charset="0"/>
                           </a:rPr>
                         </m:ctrlPr>
@@ -22347,7 +22373,7 @@
             </p:txBody>
           </p:sp>
         </mc:Choice>
-        <mc:Fallback>
+        <mc:Fallback xmlns="">
           <p:sp>
             <p:nvSpPr>
               <p:cNvPr id="3" name="Google Shape;159;p10">
@@ -22549,8 +22575,8 @@
           </a:p>
         </p:txBody>
       </p:sp>
-      <mc:AlternateContent xmlns:mc="http://schemas.openxmlformats.org/markup-compatibility/2006">
-        <mc:Choice xmlns:a14="http://schemas.microsoft.com/office/drawing/2010/main" Requires="a14">
+      <mc:AlternateContent xmlns:mc="http://schemas.openxmlformats.org/markup-compatibility/2006" xmlns:a14="http://schemas.microsoft.com/office/drawing/2010/main">
+        <mc:Choice Requires="a14">
           <p:sp>
             <p:nvSpPr>
               <p:cNvPr id="2" name="Google Shape;159;p10">
@@ -22855,7 +22881,7 @@
             </p:txBody>
           </p:sp>
         </mc:Choice>
-        <mc:Fallback>
+        <mc:Fallback xmlns="">
           <p:sp>
             <p:nvSpPr>
               <p:cNvPr id="2" name="Google Shape;159;p10">
@@ -23036,8 +23062,8 @@
           </a:p>
         </p:txBody>
       </p:sp>
-      <mc:AlternateContent xmlns:mc="http://schemas.openxmlformats.org/markup-compatibility/2006">
-        <mc:Choice xmlns:a14="http://schemas.microsoft.com/office/drawing/2010/main" Requires="a14">
+      <mc:AlternateContent xmlns:mc="http://schemas.openxmlformats.org/markup-compatibility/2006" xmlns:a14="http://schemas.microsoft.com/office/drawing/2010/main">
+        <mc:Choice Requires="a14">
           <p:sp>
             <p:nvSpPr>
               <p:cNvPr id="2" name="Google Shape;159;p10">
@@ -23557,7 +23583,7 @@
             </p:txBody>
           </p:sp>
         </mc:Choice>
-        <mc:Fallback>
+        <mc:Fallback xmlns="">
           <p:sp>
             <p:nvSpPr>
               <p:cNvPr id="2" name="Google Shape;159;p10">
@@ -23822,7 +23848,9 @@
                 <a:spcPts val="0"/>
               </a:spcAft>
               <a:buClr>
-                <a:schemeClr val="dk1"/>
+                <a:schemeClr val="tx1">
+                  <a:lumMod val="95000"/>
+                </a:schemeClr>
               </a:buClr>
               <a:buSzPts val="2400"/>
               <a:buChar char="•"/>
@@ -23845,7 +23873,9 @@
                 <a:spcPts val="0"/>
               </a:spcAft>
               <a:buClr>
-                <a:schemeClr val="dk1"/>
+                <a:schemeClr val="tx1">
+                  <a:lumMod val="95000"/>
+                </a:schemeClr>
               </a:buClr>
               <a:buSzPts val="2800"/>
               <a:buNone/>
@@ -23868,7 +23898,9 @@
                 <a:spcPts val="0"/>
               </a:spcAft>
               <a:buClr>
-                <a:schemeClr val="dk1"/>
+                <a:schemeClr val="tx1">
+                  <a:lumMod val="95000"/>
+                </a:schemeClr>
               </a:buClr>
               <a:buSzPts val="2400"/>
               <a:buChar char="•"/>
@@ -24316,8 +24348,8 @@
           </a:p>
         </p:txBody>
       </p:sp>
-      <mc:AlternateContent xmlns:mc="http://schemas.openxmlformats.org/markup-compatibility/2006">
-        <mc:Choice xmlns:a14="http://schemas.microsoft.com/office/drawing/2010/main" Requires="a14">
+      <mc:AlternateContent xmlns:mc="http://schemas.openxmlformats.org/markup-compatibility/2006" xmlns:a14="http://schemas.microsoft.com/office/drawing/2010/main">
+        <mc:Choice Requires="a14">
           <p:sp>
             <p:nvSpPr>
               <p:cNvPr id="2" name="Google Shape;159;p10">
@@ -24709,7 +24741,7 @@
             </p:txBody>
           </p:sp>
         </mc:Choice>
-        <mc:Fallback>
+        <mc:Fallback xmlns="">
           <p:sp>
             <p:nvSpPr>
               <p:cNvPr id="2" name="Google Shape;159;p10">
@@ -25000,7 +25032,7 @@
             </a:pPr>
             <a:r>
               <a:rPr lang="en-US" dirty="0"/>
-              <a:t>PS0 (out today) due next Wednesday (Jan 22) by 11:59 pm</a:t>
+              <a:t>PS0 (out today) due next Wednesday (Sep 3) by 11:59 pm</a:t>
             </a:r>
             <a:endParaRPr dirty="0"/>
           </a:p>
@@ -25120,7 +25152,7 @@
             </a:pPr>
             <a:r>
               <a:rPr lang="en-US" dirty="0"/>
-              <a:t>Prof. Floryan office hours TBA</a:t>
+              <a:t>Prof. Floryan office hours Wed 12:30-2 and Fri 11-1</a:t>
             </a:r>
             <a:endParaRPr dirty="0"/>
           </a:p>
@@ -25261,8 +25293,8 @@
           </a:p>
         </p:txBody>
       </p:sp>
-      <mc:AlternateContent xmlns:mc="http://schemas.openxmlformats.org/markup-compatibility/2006">
-        <mc:Choice xmlns:a14="http://schemas.microsoft.com/office/drawing/2010/main" Requires="a14">
+      <mc:AlternateContent xmlns:mc="http://schemas.openxmlformats.org/markup-compatibility/2006" xmlns:a14="http://schemas.microsoft.com/office/drawing/2010/main">
+        <mc:Choice Requires="a14">
           <p:sp>
             <p:nvSpPr>
               <p:cNvPr id="2" name="Google Shape;159;p10">
@@ -25872,7 +25904,7 @@
             </p:txBody>
           </p:sp>
         </mc:Choice>
-        <mc:Fallback>
+        <mc:Fallback xmlns="">
           <p:sp>
             <p:nvSpPr>
               <p:cNvPr id="2" name="Google Shape;159;p10">
@@ -25999,8 +26031,8 @@
           </a:p>
         </p:txBody>
       </p:sp>
-      <mc:AlternateContent xmlns:mc="http://schemas.openxmlformats.org/markup-compatibility/2006">
-        <mc:Choice xmlns:a14="http://schemas.microsoft.com/office/drawing/2010/main" Requires="a14">
+      <mc:AlternateContent xmlns:mc="http://schemas.openxmlformats.org/markup-compatibility/2006" xmlns:a14="http://schemas.microsoft.com/office/drawing/2010/main">
+        <mc:Choice Requires="a14">
           <p:sp>
             <p:nvSpPr>
               <p:cNvPr id="2" name="Google Shape;159;p10">
@@ -26696,7 +26728,7 @@
             </p:txBody>
           </p:sp>
         </mc:Choice>
-        <mc:Fallback>
+        <mc:Fallback xmlns="">
           <p:sp>
             <p:nvSpPr>
               <p:cNvPr id="2" name="Google Shape;159;p10">
@@ -27350,8 +27382,8 @@
           </a:p>
         </p:txBody>
       </p:sp>
-      <mc:AlternateContent xmlns:mc="http://schemas.openxmlformats.org/markup-compatibility/2006">
-        <mc:Choice xmlns:a14="http://schemas.microsoft.com/office/drawing/2010/main" Requires="a14">
+      <mc:AlternateContent xmlns:mc="http://schemas.openxmlformats.org/markup-compatibility/2006" xmlns:a14="http://schemas.microsoft.com/office/drawing/2010/main">
+        <mc:Choice Requires="a14">
           <p:sp>
             <p:nvSpPr>
               <p:cNvPr id="2" name="Google Shape;159;p10">
@@ -28166,7 +28198,7 @@
             </p:txBody>
           </p:sp>
         </mc:Choice>
-        <mc:Fallback>
+        <mc:Fallback xmlns="">
           <p:sp>
             <p:nvSpPr>
               <p:cNvPr id="2" name="Google Shape;159;p10">
@@ -29311,7 +29343,9 @@
                 <a:spcPts val="0"/>
               </a:spcAft>
               <a:buClr>
-                <a:schemeClr val="dk1"/>
+                <a:schemeClr val="tx1">
+                  <a:lumMod val="95000"/>
+                </a:schemeClr>
               </a:buClr>
               <a:buSzPts val="2800"/>
               <a:buFont typeface="Arial"/>
@@ -29335,7 +29369,9 @@
                 <a:spcPts val="0"/>
               </a:spcAft>
               <a:buClr>
-                <a:schemeClr val="dk1"/>
+                <a:schemeClr val="tx1">
+                  <a:lumMod val="95000"/>
+                </a:schemeClr>
               </a:buClr>
               <a:buSzPts val="2800"/>
               <a:buFont typeface="Arial"/>
@@ -29359,7 +29395,9 @@
                 <a:spcPts val="0"/>
               </a:spcAft>
               <a:buClr>
-                <a:schemeClr val="dk1"/>
+                <a:schemeClr val="tx1">
+                  <a:lumMod val="95000"/>
+                </a:schemeClr>
               </a:buClr>
               <a:buSzPts val="2800"/>
               <a:buFont typeface="Arial"/>
@@ -29403,7 +29441,9 @@
                 <a:spcPts val="0"/>
               </a:spcAft>
               <a:buClr>
-                <a:schemeClr val="dk1"/>
+                <a:schemeClr val="tx1">
+                  <a:lumMod val="95000"/>
+                </a:schemeClr>
               </a:buClr>
               <a:buSzPts val="2800"/>
               <a:buNone/>
@@ -29426,7 +29466,9 @@
                 <a:spcPts val="0"/>
               </a:spcAft>
               <a:buClr>
-                <a:schemeClr val="dk1"/>
+                <a:schemeClr val="tx1">
+                  <a:lumMod val="95000"/>
+                </a:schemeClr>
               </a:buClr>
               <a:buSzPts val="2800"/>
               <a:buFont typeface="Arial"/>
@@ -29450,7 +29492,9 @@
                 <a:spcPts val="0"/>
               </a:spcAft>
               <a:buClr>
-                <a:schemeClr val="dk1"/>
+                <a:schemeClr val="tx1">
+                  <a:lumMod val="95000"/>
+                </a:schemeClr>
               </a:buClr>
               <a:buSzPts val="2800"/>
               <a:buFont typeface="Arial"/>
@@ -29478,7 +29522,9 @@
                 <a:spcPts val="0"/>
               </a:spcAft>
               <a:buClr>
-                <a:schemeClr val="dk1"/>
+                <a:schemeClr val="tx1">
+                  <a:lumMod val="95000"/>
+                </a:schemeClr>
               </a:buClr>
               <a:buSzPts val="2800"/>
               <a:buNone/>
@@ -29769,7 +29815,9 @@
                 <a:spcPts val="0"/>
               </a:spcAft>
               <a:buClr>
-                <a:schemeClr val="dk1"/>
+                <a:schemeClr val="tx1">
+                  <a:lumMod val="95000"/>
+                </a:schemeClr>
               </a:buClr>
               <a:buSzPts val="2800"/>
               <a:buFont typeface="Arial"/>
@@ -29817,7 +29865,9 @@
                 <a:spcPts val="0"/>
               </a:spcAft>
               <a:buClr>
-                <a:schemeClr val="dk1"/>
+                <a:schemeClr val="tx1">
+                  <a:lumMod val="95000"/>
+                </a:schemeClr>
               </a:buClr>
               <a:buSzPts val="2400"/>
               <a:buChar char="•"/>
@@ -29840,7 +29890,9 @@
                 <a:spcPts val="0"/>
               </a:spcAft>
               <a:buClr>
-                <a:schemeClr val="dk1"/>
+                <a:schemeClr val="tx1">
+                  <a:lumMod val="95000"/>
+                </a:schemeClr>
               </a:buClr>
               <a:buSzPts val="2800"/>
               <a:buFont typeface="Arial"/>
@@ -29872,7 +29924,9 @@
                 <a:spcPts val="0"/>
               </a:spcAft>
               <a:buClr>
-                <a:schemeClr val="dk1"/>
+                <a:schemeClr val="tx1">
+                  <a:lumMod val="95000"/>
+                </a:schemeClr>
               </a:buClr>
               <a:buSzPts val="2800"/>
               <a:buFont typeface="Arial"/>
@@ -30055,7 +30109,9 @@
                 <a:spcPts val="0"/>
               </a:spcAft>
               <a:buClr>
-                <a:schemeClr val="dk1"/>
+                <a:schemeClr val="tx1">
+                  <a:lumMod val="95000"/>
+                </a:schemeClr>
               </a:buClr>
               <a:buSzPct val="100000"/>
               <a:buFont typeface="Calibri"/>
@@ -30094,7 +30150,9 @@
                 <a:spcPts val="0"/>
               </a:spcAft>
               <a:buClr>
-                <a:schemeClr val="dk1"/>
+                <a:schemeClr val="tx1">
+                  <a:lumMod val="95000"/>
+                </a:schemeClr>
               </a:buClr>
               <a:buSzPct val="100000"/>
               <a:buFont typeface="Calibri"/>
@@ -30122,7 +30180,9 @@
                 <a:spcPts val="0"/>
               </a:spcAft>
               <a:buClr>
-                <a:schemeClr val="dk1"/>
+                <a:schemeClr val="tx1">
+                  <a:lumMod val="95000"/>
+                </a:schemeClr>
               </a:buClr>
               <a:buSzPct val="100000"/>
               <a:buFont typeface="Calibri"/>
@@ -30146,7 +30206,9 @@
                 <a:spcPts val="0"/>
               </a:spcAft>
               <a:buClr>
-                <a:schemeClr val="dk1"/>
+                <a:schemeClr val="tx1">
+                  <a:lumMod val="95000"/>
+                </a:schemeClr>
               </a:buClr>
               <a:buSzPct val="100000"/>
               <a:buFont typeface="Calibri"/>
@@ -30174,7 +30236,9 @@
                 <a:spcPts val="0"/>
               </a:spcAft>
               <a:buClr>
-                <a:schemeClr val="dk1"/>
+                <a:schemeClr val="tx1">
+                  <a:lumMod val="95000"/>
+                </a:schemeClr>
               </a:buClr>
               <a:buSzPct val="100000"/>
               <a:buNone/>
@@ -30197,7 +30261,9 @@
                 <a:spcPts val="0"/>
               </a:spcAft>
               <a:buClr>
-                <a:schemeClr val="dk1"/>
+                <a:schemeClr val="tx1">
+                  <a:lumMod val="95000"/>
+                </a:schemeClr>
               </a:buClr>
               <a:buSzPct val="100000"/>
               <a:buFont typeface="Arial"/>
@@ -30233,7 +30299,9 @@
                 <a:spcPts val="0"/>
               </a:spcAft>
               <a:buClr>
-                <a:schemeClr val="dk1"/>
+                <a:schemeClr val="tx1">
+                  <a:lumMod val="95000"/>
+                </a:schemeClr>
               </a:buClr>
               <a:buSzPct val="100000"/>
               <a:buFont typeface="Arial"/>
@@ -30265,7 +30333,9 @@
                 <a:spcPts val="0"/>
               </a:spcAft>
               <a:buClr>
-                <a:schemeClr val="dk1"/>
+                <a:schemeClr val="tx1">
+                  <a:lumMod val="95000"/>
+                </a:schemeClr>
               </a:buClr>
               <a:buSzPct val="100000"/>
               <a:buFont typeface="Arial"/>
@@ -30743,7 +30813,9 @@
                 <a:spcPts val="0"/>
               </a:spcAft>
               <a:buClr>
-                <a:schemeClr val="dk1"/>
+                <a:schemeClr val="tx1">
+                  <a:lumMod val="95000"/>
+                </a:schemeClr>
               </a:buClr>
               <a:buSzPct val="100000"/>
               <a:buFont typeface="Calibri"/>
@@ -30782,7 +30854,9 @@
                 <a:spcPts val="0"/>
               </a:spcAft>
               <a:buClr>
-                <a:schemeClr val="dk1"/>
+                <a:schemeClr val="tx1">
+                  <a:lumMod val="95000"/>
+                </a:schemeClr>
               </a:buClr>
               <a:buSzPct val="100000"/>
               <a:buFont typeface="Calibri"/>
@@ -30814,7 +30888,9 @@
                 <a:spcPts val="0"/>
               </a:spcAft>
               <a:buClr>
-                <a:schemeClr val="dk1"/>
+                <a:schemeClr val="tx1">
+                  <a:lumMod val="95000"/>
+                </a:schemeClr>
               </a:buClr>
               <a:buSzPct val="100000"/>
               <a:buFont typeface="Calibri"/>
@@ -30846,7 +30922,9 @@
                 <a:spcPts val="0"/>
               </a:spcAft>
               <a:buClr>
-                <a:schemeClr val="dk1"/>
+                <a:schemeClr val="tx1">
+                  <a:lumMod val="95000"/>
+                </a:schemeClr>
               </a:buClr>
               <a:buSzPct val="100000"/>
               <a:buNone/>
@@ -30869,7 +30947,9 @@
                 <a:spcPts val="0"/>
               </a:spcAft>
               <a:buClr>
-                <a:schemeClr val="dk1"/>
+                <a:schemeClr val="tx1">
+                  <a:lumMod val="95000"/>
+                </a:schemeClr>
               </a:buClr>
               <a:buSzPct val="100000"/>
               <a:buFont typeface="Arial"/>
@@ -30901,7 +30981,9 @@
                 <a:spcPts val="0"/>
               </a:spcAft>
               <a:buClr>
-                <a:schemeClr val="dk1"/>
+                <a:schemeClr val="tx1">
+                  <a:lumMod val="95000"/>
+                </a:schemeClr>
               </a:buClr>
               <a:buSzPct val="100000"/>
               <a:buFont typeface="Arial"/>
@@ -30941,7 +31023,9 @@
                 <a:spcPts val="0"/>
               </a:spcAft>
               <a:buClr>
-                <a:schemeClr val="dk1"/>
+                <a:schemeClr val="tx1">
+                  <a:lumMod val="95000"/>
+                </a:schemeClr>
               </a:buClr>
               <a:buSzPct val="100000"/>
               <a:buFont typeface="Arial"/>
@@ -30965,7 +31049,9 @@
                 <a:spcPts val="0"/>
               </a:spcAft>
               <a:buClr>
-                <a:schemeClr val="dk1"/>
+                <a:schemeClr val="tx1">
+                  <a:lumMod val="95000"/>
+                </a:schemeClr>
               </a:buClr>
               <a:buSzPct val="100000"/>
               <a:buFont typeface="Arial"/>
@@ -30989,7 +31075,9 @@
                 <a:spcPts val="0"/>
               </a:spcAft>
               <a:buClr>
-                <a:schemeClr val="dk1"/>
+                <a:schemeClr val="tx1">
+                  <a:lumMod val="95000"/>
+                </a:schemeClr>
               </a:buClr>
               <a:buSzPct val="100000"/>
               <a:buFont typeface="Arial"/>
@@ -31259,7 +31347,9 @@
                 <a:spcPts val="0"/>
               </a:spcAft>
               <a:buClr>
-                <a:schemeClr val="dk1"/>
+                <a:schemeClr val="tx1">
+                  <a:lumMod val="95000"/>
+                </a:schemeClr>
               </a:buClr>
               <a:buSzPct val="100000"/>
               <a:buFont typeface="Arial"/>
@@ -31283,7 +31373,9 @@
                 <a:spcPts val="0"/>
               </a:spcAft>
               <a:buClr>
-                <a:schemeClr val="dk1"/>
+                <a:schemeClr val="tx1">
+                  <a:lumMod val="95000"/>
+                </a:schemeClr>
               </a:buClr>
               <a:buSzPct val="100000"/>
               <a:buFont typeface="Arial"/>
@@ -31307,7 +31399,9 @@
                 <a:spcPts val="0"/>
               </a:spcAft>
               <a:buClr>
-                <a:schemeClr val="dk1"/>
+                <a:schemeClr val="tx1">
+                  <a:lumMod val="95000"/>
+                </a:schemeClr>
               </a:buClr>
               <a:buSzPct val="100000"/>
               <a:buFont typeface="Arial"/>
@@ -31331,7 +31425,9 @@
                 <a:spcPts val="0"/>
               </a:spcAft>
               <a:buClr>
-                <a:schemeClr val="dk1"/>
+                <a:schemeClr val="tx1">
+                  <a:lumMod val="95000"/>
+                </a:schemeClr>
               </a:buClr>
               <a:buSzPct val="100000"/>
               <a:buFont typeface="Arial"/>
@@ -31355,7 +31451,9 @@
                 <a:spcPts val="0"/>
               </a:spcAft>
               <a:buClr>
-                <a:schemeClr val="dk1"/>
+                <a:schemeClr val="tx1">
+                  <a:lumMod val="95000"/>
+                </a:schemeClr>
               </a:buClr>
               <a:buSzPct val="100000"/>
               <a:buFont typeface="Arial"/>
@@ -35106,7 +35204,9 @@
                 <a:spcPts val="0"/>
               </a:spcAft>
               <a:buClr>
-                <a:schemeClr val="dk1"/>
+                <a:schemeClr val="tx1">
+                  <a:lumMod val="95000"/>
+                </a:schemeClr>
               </a:buClr>
               <a:buSzPct val="100000"/>
               <a:buFont typeface="Arial"/>
@@ -35130,7 +35230,9 @@
                 <a:spcPts val="0"/>
               </a:spcAft>
               <a:buClr>
-                <a:schemeClr val="dk1"/>
+                <a:schemeClr val="tx1">
+                  <a:lumMod val="95000"/>
+                </a:schemeClr>
               </a:buClr>
               <a:buSzPct val="100000"/>
               <a:buChar char="•"/>
@@ -35153,7 +35255,9 @@
                 <a:spcPts val="0"/>
               </a:spcAft>
               <a:buClr>
-                <a:schemeClr val="dk1"/>
+                <a:schemeClr val="tx1">
+                  <a:lumMod val="95000"/>
+                </a:schemeClr>
               </a:buClr>
               <a:buSzPct val="100000"/>
               <a:buChar char="•"/>
@@ -35176,7 +35280,9 @@
                 <a:spcPts val="0"/>
               </a:spcAft>
               <a:buClr>
-                <a:schemeClr val="dk1"/>
+                <a:schemeClr val="tx1">
+                  <a:lumMod val="95000"/>
+                </a:schemeClr>
               </a:buClr>
               <a:buSzPct val="100000"/>
               <a:buChar char="•"/>
@@ -35199,7 +35305,9 @@
                 <a:spcPts val="0"/>
               </a:spcAft>
               <a:buClr>
-                <a:schemeClr val="dk1"/>
+                <a:schemeClr val="tx1">
+                  <a:lumMod val="95000"/>
+                </a:schemeClr>
               </a:buClr>
               <a:buSzPct val="100000"/>
               <a:buFont typeface="Arial"/>
@@ -35223,7 +35331,9 @@
                 <a:spcPts val="0"/>
               </a:spcAft>
               <a:buClr>
-                <a:schemeClr val="dk1"/>
+                <a:schemeClr val="tx1">
+                  <a:lumMod val="95000"/>
+                </a:schemeClr>
               </a:buClr>
               <a:buSzPct val="100000"/>
               <a:buChar char="•"/>
@@ -35246,7 +35356,9 @@
                 <a:spcPts val="0"/>
               </a:spcAft>
               <a:buClr>
-                <a:schemeClr val="dk1"/>
+                <a:schemeClr val="tx1">
+                  <a:lumMod val="95000"/>
+                </a:schemeClr>
               </a:buClr>
               <a:buSzPct val="100000"/>
               <a:buChar char="•"/>
@@ -35269,7 +35381,9 @@
                 <a:spcPts val="0"/>
               </a:spcAft>
               <a:buClr>
-                <a:schemeClr val="dk1"/>
+                <a:schemeClr val="tx1">
+                  <a:lumMod val="95000"/>
+                </a:schemeClr>
               </a:buClr>
               <a:buSzPct val="100000"/>
               <a:buChar char="•"/>
@@ -35292,7 +35406,9 @@
                 <a:spcPts val="0"/>
               </a:spcAft>
               <a:buClr>
-                <a:schemeClr val="dk1"/>
+                <a:schemeClr val="tx1">
+                  <a:lumMod val="95000"/>
+                </a:schemeClr>
               </a:buClr>
               <a:buSzPct val="100000"/>
               <a:buFont typeface="Arial"/>
@@ -35316,7 +35432,9 @@
                 <a:spcPts val="0"/>
               </a:spcAft>
               <a:buClr>
-                <a:schemeClr val="dk1"/>
+                <a:schemeClr val="tx1">
+                  <a:lumMod val="95000"/>
+                </a:schemeClr>
               </a:buClr>
               <a:buSzPct val="100000"/>
               <a:buChar char="•"/>
@@ -35494,7 +35612,9 @@
                 <a:spcPts val="0"/>
               </a:spcAft>
               <a:buClr>
-                <a:schemeClr val="dk1"/>
+                <a:schemeClr val="tx1">
+                  <a:lumMod val="95000"/>
+                </a:schemeClr>
               </a:buClr>
               <a:buSzPts val="2400"/>
               <a:buChar char="•"/>
@@ -35517,7 +35637,9 @@
                 <a:spcPts val="0"/>
               </a:spcAft>
               <a:buClr>
-                <a:schemeClr val="dk1"/>
+                <a:schemeClr val="tx1">
+                  <a:lumMod val="95000"/>
+                </a:schemeClr>
               </a:buClr>
               <a:buSzPts val="2400"/>
               <a:buChar char="•"/>
@@ -35540,7 +35662,9 @@
                 <a:spcPts val="0"/>
               </a:spcAft>
               <a:buClr>
-                <a:schemeClr val="dk1"/>
+                <a:schemeClr val="tx1">
+                  <a:lumMod val="95000"/>
+                </a:schemeClr>
               </a:buClr>
               <a:buSzPts val="2400"/>
               <a:buChar char="•"/>
@@ -35571,7 +35695,9 @@
                 <a:spcPts val="0"/>
               </a:spcAft>
               <a:buClr>
-                <a:schemeClr val="dk1"/>
+                <a:schemeClr val="tx1">
+                  <a:lumMod val="95000"/>
+                </a:schemeClr>
               </a:buClr>
               <a:buSzPts val="2800"/>
               <a:buNone/>
@@ -35594,7 +35720,9 @@
                 <a:spcPts val="0"/>
               </a:spcAft>
               <a:buClr>
-                <a:schemeClr val="dk1"/>
+                <a:schemeClr val="tx1">
+                  <a:lumMod val="95000"/>
+                </a:schemeClr>
               </a:buClr>
               <a:buSzPts val="2400"/>
               <a:buChar char="•"/>
@@ -35617,7 +35745,9 @@
                 <a:spcPts val="0"/>
               </a:spcAft>
               <a:buClr>
-                <a:schemeClr val="dk1"/>
+                <a:schemeClr val="tx1">
+                  <a:lumMod val="95000"/>
+                </a:schemeClr>
               </a:buClr>
               <a:buSzPts val="2000"/>
               <a:buChar char="•"/>
@@ -35680,7 +35810,9 @@
                 <a:spcPts val="0"/>
               </a:spcAft>
               <a:buClr>
-                <a:schemeClr val="dk1"/>
+                <a:schemeClr val="tx1">
+                  <a:lumMod val="95000"/>
+                </a:schemeClr>
               </a:buClr>
               <a:buSzPts val="2000"/>
               <a:buChar char="•"/>
@@ -35725,7 +35857,9 @@
                 <a:spcPts val="0"/>
               </a:spcAft>
               <a:buClr>
-                <a:schemeClr val="dk1"/>
+                <a:schemeClr val="tx1">
+                  <a:lumMod val="95000"/>
+                </a:schemeClr>
               </a:buClr>
               <a:buSzPts val="2000"/>
               <a:buChar char="•"/>
@@ -35792,7 +35926,9 @@
                 <a:spcPts val="0"/>
               </a:spcAft>
               <a:buClr>
-                <a:schemeClr val="dk1"/>
+                <a:schemeClr val="tx1">
+                  <a:lumMod val="95000"/>
+                </a:schemeClr>
               </a:buClr>
               <a:buSzPts val="2400"/>
               <a:buChar char="•"/>
@@ -36233,7 +36369,9 @@
                 <a:spcPts val="0"/>
               </a:spcAft>
               <a:buClr>
-                <a:schemeClr val="dk1"/>
+                <a:schemeClr val="tx1">
+                  <a:lumMod val="95000"/>
+                </a:schemeClr>
               </a:buClr>
               <a:buSzPct val="100000"/>
               <a:buFont typeface="Arial"/>
@@ -36257,7 +36395,9 @@
                 <a:spcPts val="0"/>
               </a:spcAft>
               <a:buClr>
-                <a:schemeClr val="dk1"/>
+                <a:schemeClr val="tx1">
+                  <a:lumMod val="95000"/>
+                </a:schemeClr>
               </a:buClr>
               <a:buSzPct val="100000"/>
               <a:buFont typeface="Arial"/>
@@ -36281,7 +36421,9 @@
                 <a:spcPts val="0"/>
               </a:spcAft>
               <a:buClr>
-                <a:schemeClr val="dk1"/>
+                <a:schemeClr val="tx1">
+                  <a:lumMod val="95000"/>
+                </a:schemeClr>
               </a:buClr>
               <a:buSzPct val="100000"/>
               <a:buChar char="•"/>
@@ -36324,7 +36466,9 @@
                 <a:spcPts val="0"/>
               </a:spcAft>
               <a:buClr>
-                <a:schemeClr val="dk1"/>
+                <a:schemeClr val="tx1">
+                  <a:lumMod val="95000"/>
+                </a:schemeClr>
               </a:buClr>
               <a:buSzPct val="100000"/>
               <a:buChar char="•"/>
@@ -36347,7 +36491,9 @@
                 <a:spcPts val="0"/>
               </a:spcAft>
               <a:buClr>
-                <a:schemeClr val="dk1"/>
+                <a:schemeClr val="tx1">
+                  <a:lumMod val="95000"/>
+                </a:schemeClr>
               </a:buClr>
               <a:buSzPct val="100000"/>
               <a:buFont typeface="Arial"/>
@@ -36371,7 +36517,9 @@
                 <a:spcPts val="0"/>
               </a:spcAft>
               <a:buClr>
-                <a:schemeClr val="dk1"/>
+                <a:schemeClr val="tx1">
+                  <a:lumMod val="95000"/>
+                </a:schemeClr>
               </a:buClr>
               <a:buSzPct val="100000"/>
               <a:buFont typeface="Arial"/>
@@ -36399,7 +36547,9 @@
                 <a:spcPts val="0"/>
               </a:spcAft>
               <a:buClr>
-                <a:schemeClr val="dk1"/>
+                <a:schemeClr val="tx1">
+                  <a:lumMod val="95000"/>
+                </a:schemeClr>
               </a:buClr>
               <a:buSzPct val="100000"/>
               <a:buChar char="•"/>
